--- a/slides/week01/ch00_setup.pptx
+++ b/slides/week01/ch00_setup.pptx
@@ -26,6 +26,7 @@
     <p:sldId id="274" r:id="rId25"/>
     <p:sldId id="275" r:id="rId26"/>
     <p:sldId id="276" r:id="rId27"/>
+    <p:sldId id="277" r:id="rId28"/>
   </p:sldIdLst>
   <p:notesMasterIdLst>
     <p:notesMasterId r:id="rId15"/>
@@ -591,7 +592,7 @@
           <a:lstStyle/>
           <a:p>
             <a:r>
-              <a:t>plot_record(sim.record)로 그린다. 그림을 먼저 보여주고 마지막 30분에서 무엇이 이상한지 학생이 먼저 찾게 한다.</a:t>
+              <a:t>세 번째 숫자가 다음 질문을 만든다. 이 질문에 답하려면 같은 수요와 같은 도로망에서 차량 대수만 변경해 다시 실행해야 하고, 그 도구를 이 책에서 만든다.</a:t>
             </a:r>
           </a:p>
         </p:txBody>
@@ -661,7 +662,7 @@
           <a:lstStyle/>
           <a:p>
             <a:r>
-              <a:t>시뮬레이션이 차량 80대를 항상 80대로 다루지 않는다는 뜻이다. 이런 것을 미리 알고 있어야 결과를 잘못 읽지 않는다.</a:t>
+              <a:t>plot_record(sim.record)로 그린다. 그림을 먼저 보여주고 마지막 30분에서 무엇이 이상한지 학생이 먼저 찾게 한다.</a:t>
             </a:r>
           </a:p>
         </p:txBody>
@@ -731,7 +732,7 @@
           <a:lstStyle/>
           <a:p>
             <a:r>
-              <a:t>학습 목표 네 가지가 각자 노트북에서 확인됐는지 손을 들게 해서 점검한다.</a:t>
+              <a:t>시뮬레이션이 차량 80대를 항상 80대로 다루지 않는다는 뜻이다. 이런 것을 미리 알고 있어야 결과를 잘못 읽지 않는다.</a:t>
             </a:r>
           </a:p>
         </p:txBody>
@@ -801,6 +802,76 @@
           <a:lstStyle/>
           <a:p>
             <a:r>
+              <a:t>학습 목표 네 가지가 각자 노트북에서 확인됐는지 손을 들게 해서 점검한다.</a:t>
+            </a:r>
+          </a:p>
+        </p:txBody>
+      </p:sp>
+      <p:sp>
+        <p:nvSpPr>
+          <p:cNvPr id="4" name="Slide Number Placeholder 3"/>
+          <p:cNvSpPr>
+            <a:spLocks noGrp="1"/>
+          </p:cNvSpPr>
+          <p:nvPr>
+            <p:ph type="sldNum" idx="5" sz="quarter"/>
+          </p:nvPr>
+        </p:nvSpPr>
+        <p:spPr/>
+      </p:sp>
+    </p:spTree>
+  </p:cSld>
+  <p:clrMapOvr>
+    <a:masterClrMapping/>
+  </p:clrMapOvr>
+</p:notes>
+</file>
+
+<file path=ppt/notesSlides/notesSlide14.xml><?xml version="1.0" encoding="utf-8"?>
+<p:notes xmlns:a="http://schemas.openxmlformats.org/drawingml/2006/main" xmlns:p="http://schemas.openxmlformats.org/presentationml/2006/main" xmlns:r="http://schemas.openxmlformats.org/officeDocument/2006/relationships">
+  <p:cSld>
+    <p:spTree>
+      <p:nvGrpSpPr>
+        <p:cNvPr id="1" name=""/>
+        <p:cNvGrpSpPr/>
+        <p:nvPr/>
+      </p:nvGrpSpPr>
+      <p:grpSpPr>
+        <a:xfrm>
+          <a:off x="0" y="0"/>
+          <a:ext cx="0" cy="0"/>
+          <a:chOff x="0" y="0"/>
+          <a:chExt cx="0" cy="0"/>
+        </a:xfrm>
+      </p:grpSpPr>
+      <p:sp>
+        <p:nvSpPr>
+          <p:cNvPr id="2" name="Slide Image Placeholder 1"/>
+          <p:cNvSpPr>
+            <a:spLocks noGrp="1"/>
+          </p:cNvSpPr>
+          <p:nvPr>
+            <p:ph type="sldImg" idx="2"/>
+          </p:nvPr>
+        </p:nvSpPr>
+        <p:spPr/>
+      </p:sp>
+      <p:sp>
+        <p:nvSpPr>
+          <p:cNvPr id="3" name="Notes Placeholder 2"/>
+          <p:cNvSpPr>
+            <a:spLocks noGrp="1"/>
+          </p:cNvSpPr>
+          <p:nvPr>
+            <p:ph type="body" idx="3" sz="quarter"/>
+          </p:nvPr>
+        </p:nvSpPr>
+        <p:spPr/>
+        <p:txBody>
+          <a:bodyPr/>
+          <a:lstStyle/>
+          <a:p>
+            <a:r>
               <a:t>확인 질문: 서비스율 1.0인데 왜 차량을 줄이자는 이야기가 나오는가. 가동률 0.27과 연결해서 답하게 한다.</a:t>
             </a:r>
           </a:p>
@@ -1011,7 +1082,7 @@
           <a:lstStyle/>
           <a:p>
             <a:r>
-              <a:t>설치 명령은 교재 0.1에 그대로 있다. 화면에 표시한 상태로 한 줄씩 함께 입력한다. 막히는 사람은 손을 들게 하고, 끝난 사람이 옆자리를 돕게 한다.</a:t>
+              <a:t>슬라이드는 개요만 다룬다. 세부 내용과 코드는 교재 원고와 실습 노트북에서 확인한다. 교재 저장소는 비공개이므로 초대받은 계정으로 로그인한 상태여야 주소가 열린다.</a:t>
             </a:r>
           </a:p>
         </p:txBody>
@@ -1081,7 +1152,7 @@
           <a:lstStyle/>
           <a:p>
             <a:r>
-              <a:t>하남시 전체치고 노드가 적어 보이는 이유를 여기서 한 번 설명한다. modes 인자가 왜 필요한지는 2장에서 다루므로 오늘은 넘어간다.</a:t>
+              <a:t>설치 명령은 교재 0.1에 그대로 있다. 화면에 표시한 상태로 한 줄씩 함께 입력한다. 막히는 사람은 손을 들게 하고, 끝난 사람이 옆자리를 돕게 한다.</a:t>
             </a:r>
           </a:p>
         </p:txBody>
@@ -1151,7 +1222,7 @@
           <a:lstStyle/>
           <a:p>
             <a:r>
-              <a:t>공용 서버 주소와 팀별 포트는 단톡방에 올린다. 저장소의 data/fixtures/에 실제 실행 결과가 녹화되어 있고, 연결이 안 되면 그것을 대신 반환한다.</a:t>
+              <a:t>하남시 전체치고 노드가 적어 보이는 이유를 여기서 한 번 설명한다. modes 인자가 왜 필요한지는 2장에서 다루므로 오늘은 넘어간다.</a:t>
             </a:r>
           </a:p>
         </p:txBody>
@@ -1221,7 +1292,7 @@
           <a:lstStyle/>
           <a:p>
             <a:r>
-              <a:t>이 구분을 지금 분명히 해 둬야 나중에 학생들이 FixtureMissing을 코드 버그로 오해하지 않는다.</a:t>
+              <a:t>공용 서버 주소와 팀별 포트는 단톡방에 올린다. 저장소의 data/fixtures/에 실제 실행 결과가 녹화되어 있고, 연결이 안 되면 그것을 대신 반환한다.</a:t>
             </a:r>
           </a:p>
         </p:txBody>
@@ -1291,7 +1362,7 @@
           <a:lstStyle/>
           <a:p>
             <a:r>
-              <a:t>인자 이름과 값을 한 번 읽고 넘어간다. 시간을 분 단위 정수로 다루는 규칙은 11장 시뮬레이션 루프까지 그대로 간다.</a:t>
+              <a:t>이 구분을 지금 분명히 해 둬야 나중에 학생들이 FixtureMissing을 코드 버그로 오해하지 않는다.</a:t>
             </a:r>
           </a:p>
         </p:txBody>
@@ -1361,7 +1432,7 @@
           <a:lstStyle/>
           <a:p>
             <a:r>
-              <a:t>세 번째 숫자가 다음 질문을 만든다. 이 질문에 답하려면 같은 수요와 같은 도로망에서 차량 대수만 변경해 다시 실행해야 하고, 그 도구를 이 책에서 만든다.</a:t>
+              <a:t>인자 이름과 값을 한 번 읽고 넘어간다. 시간을 분 단위 정수로 다루는 규칙은 11장 시뮬레이션 루프까지 그대로 간다.</a:t>
             </a:r>
           </a:p>
         </p:txBody>
@@ -4996,6 +5067,118 @@
       <p:grpSpPr/>
       <p:sp>
         <p:nvSpPr>
+          <p:cNvPr id="2" name="Text Placeholder 1"/>
+          <p:cNvSpPr>
+            <a:spLocks noGrp="1"/>
+          </p:cNvSpPr>
+          <p:nvPr>
+            <p:ph type="body" idx="100"/>
+          </p:nvPr>
+        </p:nvSpPr>
+        <p:spPr/>
+        <p:txBody>
+          <a:bodyPr/>
+          <a:lstStyle/>
+          <a:p>
+            <a:r>
+              <a:t>03</a:t>
+            </a:r>
+          </a:p>
+        </p:txBody>
+      </p:sp>
+      <p:sp>
+        <p:nvSpPr>
+          <p:cNvPr id="3" name="Title 2"/>
+          <p:cNvSpPr>
+            <a:spLocks noGrp="1"/>
+          </p:cNvSpPr>
+          <p:nvPr>
+            <p:ph type="title" idx="101"/>
+          </p:nvPr>
+        </p:nvSpPr>
+        <p:spPr/>
+        <p:txBody>
+          <a:bodyPr/>
+          <a:lstStyle/>
+          <a:p>
+            <a:r>
+              <a:t>교재 0.3 엔진 연결</a:t>
+            </a:r>
+          </a:p>
+        </p:txBody>
+      </p:sp>
+      <p:sp>
+        <p:nvSpPr>
+          <p:cNvPr id="4" name="Text Placeholder 3"/>
+          <p:cNvSpPr>
+            <a:spLocks noGrp="1"/>
+          </p:cNvSpPr>
+          <p:nvPr>
+            <p:ph type="body" idx="102"/>
+          </p:nvPr>
+        </p:nvSpPr>
+        <p:spPr/>
+        <p:txBody>
+          <a:bodyPr/>
+          <a:lstStyle/>
+          <a:p>
+            <a:pPr>
+              <a:spcAft>
+                <a:spcPts val="1000"/>
+              </a:spcAft>
+            </a:pPr>
+            <a:r>
+              <a:rPr>
+                <a:solidFill>
+                  <a:srgbClr val="AFAFAF"/>
+                </a:solidFill>
+              </a:rPr>
+              <a:t>3.1  </a:t>
+            </a:r>
+            <a:r>
+              <a:t>DTUMOS에 붙는 세 가지 방법</a:t>
+            </a:r>
+          </a:p>
+          <a:p>
+            <a:pPr>
+              <a:spcAft>
+                <a:spcPts val="1000"/>
+              </a:spcAft>
+            </a:pPr>
+            <a:r>
+              <a:rPr>
+                <a:solidFill>
+                  <a:srgbClr val="AFAFAF"/>
+                </a:solidFill>
+              </a:rPr>
+              <a:t>3.2  </a:t>
+            </a:r>
+            <a:r>
+              <a:t>녹화본의 범위</a:t>
+            </a:r>
+          </a:p>
+        </p:txBody>
+      </p:sp>
+    </p:spTree>
+  </p:cSld>
+  <p:clrMapOvr>
+    <a:masterClrMapping/>
+  </p:clrMapOvr>
+</p:sld>
+</file>
+
+<file path=ppt/slides/slide11.xml><?xml version="1.0" encoding="utf-8"?>
+<p:sld xmlns:a="http://schemas.openxmlformats.org/drawingml/2006/main" xmlns:p="http://schemas.openxmlformats.org/presentationml/2006/main" xmlns:r="http://schemas.openxmlformats.org/officeDocument/2006/relationships">
+  <p:cSld>
+    <p:spTree>
+      <p:nvGrpSpPr>
+        <p:cNvPr id="1" name=""/>
+        <p:cNvGrpSpPr/>
+        <p:nvPr/>
+      </p:nvGrpSpPr>
+      <p:grpSpPr/>
+      <p:sp>
+        <p:nvSpPr>
           <p:cNvPr id="2" name="Title 1"/>
           <p:cNvSpPr>
             <a:spLocks noGrp="1"/>
@@ -5086,7 +5269,7 @@
           <a:lstStyle/>
           <a:p>
             <a:r>
-              <a:t>표 1. DTUMOS 엔진에 연결하는 세 가지 방법과 설정</a:t>
+              <a:t>표 2. DTUMOS 엔진에 연결하는 세 가지 방법과 설정</a:t>
             </a:r>
           </a:p>
         </p:txBody>
@@ -5608,7 +5791,7 @@
 </p:sld>
 </file>
 
-<file path=ppt/slides/slide11.xml><?xml version="1.0" encoding="utf-8"?>
+<file path=ppt/slides/slide12.xml><?xml version="1.0" encoding="utf-8"?>
 <p:sld xmlns:a="http://schemas.openxmlformats.org/drawingml/2006/main" xmlns:p="http://schemas.openxmlformats.org/presentationml/2006/main" xmlns:r="http://schemas.openxmlformats.org/officeDocument/2006/relationships">
   <p:cSld>
     <p:spTree>
@@ -5757,118 +5940,6 @@
               <a:t>1004</a:t>
             </a:fld>
             <a:endParaRPr lang="en-US"/>
-          </a:p>
-        </p:txBody>
-      </p:sp>
-    </p:spTree>
-  </p:cSld>
-  <p:clrMapOvr>
-    <a:masterClrMapping/>
-  </p:clrMapOvr>
-</p:sld>
-</file>
-
-<file path=ppt/slides/slide12.xml><?xml version="1.0" encoding="utf-8"?>
-<p:sld xmlns:a="http://schemas.openxmlformats.org/drawingml/2006/main" xmlns:p="http://schemas.openxmlformats.org/presentationml/2006/main" xmlns:r="http://schemas.openxmlformats.org/officeDocument/2006/relationships">
-  <p:cSld>
-    <p:spTree>
-      <p:nvGrpSpPr>
-        <p:cNvPr id="1" name=""/>
-        <p:cNvGrpSpPr/>
-        <p:nvPr/>
-      </p:nvGrpSpPr>
-      <p:grpSpPr/>
-      <p:sp>
-        <p:nvSpPr>
-          <p:cNvPr id="2" name="Text Placeholder 1"/>
-          <p:cNvSpPr>
-            <a:spLocks noGrp="1"/>
-          </p:cNvSpPr>
-          <p:nvPr>
-            <p:ph type="body" idx="100"/>
-          </p:nvPr>
-        </p:nvSpPr>
-        <p:spPr/>
-        <p:txBody>
-          <a:bodyPr/>
-          <a:lstStyle/>
-          <a:p>
-            <a:r>
-              <a:t>04</a:t>
-            </a:r>
-          </a:p>
-        </p:txBody>
-      </p:sp>
-      <p:sp>
-        <p:nvSpPr>
-          <p:cNvPr id="3" name="Title 2"/>
-          <p:cNvSpPr>
-            <a:spLocks noGrp="1"/>
-          </p:cNvSpPr>
-          <p:nvPr>
-            <p:ph type="title" idx="101"/>
-          </p:nvPr>
-        </p:nvSpPr>
-        <p:spPr/>
-        <p:txBody>
-          <a:bodyPr/>
-          <a:lstStyle/>
-          <a:p>
-            <a:r>
-              <a:t>교재 0.4 첫 시뮬레이션</a:t>
-            </a:r>
-          </a:p>
-        </p:txBody>
-      </p:sp>
-      <p:sp>
-        <p:nvSpPr>
-          <p:cNvPr id="4" name="Text Placeholder 3"/>
-          <p:cNvSpPr>
-            <a:spLocks noGrp="1"/>
-          </p:cNvSpPr>
-          <p:nvPr>
-            <p:ph type="body" idx="102"/>
-          </p:nvPr>
-        </p:nvSpPr>
-        <p:spPr/>
-        <p:txBody>
-          <a:bodyPr/>
-          <a:lstStyle/>
-          <a:p>
-            <a:pPr>
-              <a:spcAft>
-                <a:spcPts val="1000"/>
-              </a:spcAft>
-            </a:pPr>
-            <a:r>
-              <a:rPr>
-                <a:solidFill>
-                  <a:srgbClr val="AFAFAF"/>
-                </a:solidFill>
-              </a:rPr>
-              <a:t>4.1  </a:t>
-            </a:r>
-            <a:r>
-              <a:t>하남시 저녁 6시부터 자정까지</a:t>
-            </a:r>
-          </a:p>
-          <a:p>
-            <a:pPr>
-              <a:spcAft>
-                <a:spcPts val="1000"/>
-              </a:spcAft>
-            </a:pPr>
-            <a:r>
-              <a:rPr>
-                <a:solidFill>
-                  <a:srgbClr val="AFAFAF"/>
-                </a:solidFill>
-              </a:rPr>
-              <a:t>4.2  </a:t>
-            </a:r>
-            <a:r>
-              <a:t>결과 세 숫자</a:t>
-            </a:r>
           </a:p>
         </p:txBody>
       </p:sp>
@@ -5892,6 +5963,118 @@
       <p:grpSpPr/>
       <p:sp>
         <p:nvSpPr>
+          <p:cNvPr id="2" name="Text Placeholder 1"/>
+          <p:cNvSpPr>
+            <a:spLocks noGrp="1"/>
+          </p:cNvSpPr>
+          <p:nvPr>
+            <p:ph type="body" idx="100"/>
+          </p:nvPr>
+        </p:nvSpPr>
+        <p:spPr/>
+        <p:txBody>
+          <a:bodyPr/>
+          <a:lstStyle/>
+          <a:p>
+            <a:r>
+              <a:t>04</a:t>
+            </a:r>
+          </a:p>
+        </p:txBody>
+      </p:sp>
+      <p:sp>
+        <p:nvSpPr>
+          <p:cNvPr id="3" name="Title 2"/>
+          <p:cNvSpPr>
+            <a:spLocks noGrp="1"/>
+          </p:cNvSpPr>
+          <p:nvPr>
+            <p:ph type="title" idx="101"/>
+          </p:nvPr>
+        </p:nvSpPr>
+        <p:spPr/>
+        <p:txBody>
+          <a:bodyPr/>
+          <a:lstStyle/>
+          <a:p>
+            <a:r>
+              <a:t>교재 0.4 첫 시뮬레이션</a:t>
+            </a:r>
+          </a:p>
+        </p:txBody>
+      </p:sp>
+      <p:sp>
+        <p:nvSpPr>
+          <p:cNvPr id="4" name="Text Placeholder 3"/>
+          <p:cNvSpPr>
+            <a:spLocks noGrp="1"/>
+          </p:cNvSpPr>
+          <p:nvPr>
+            <p:ph type="body" idx="102"/>
+          </p:nvPr>
+        </p:nvSpPr>
+        <p:spPr/>
+        <p:txBody>
+          <a:bodyPr/>
+          <a:lstStyle/>
+          <a:p>
+            <a:pPr>
+              <a:spcAft>
+                <a:spcPts val="1000"/>
+              </a:spcAft>
+            </a:pPr>
+            <a:r>
+              <a:rPr>
+                <a:solidFill>
+                  <a:srgbClr val="AFAFAF"/>
+                </a:solidFill>
+              </a:rPr>
+              <a:t>4.1  </a:t>
+            </a:r>
+            <a:r>
+              <a:t>하남시 저녁 6시부터 자정까지</a:t>
+            </a:r>
+          </a:p>
+          <a:p>
+            <a:pPr>
+              <a:spcAft>
+                <a:spcPts val="1000"/>
+              </a:spcAft>
+            </a:pPr>
+            <a:r>
+              <a:rPr>
+                <a:solidFill>
+                  <a:srgbClr val="AFAFAF"/>
+                </a:solidFill>
+              </a:rPr>
+              <a:t>4.2  </a:t>
+            </a:r>
+            <a:r>
+              <a:t>결과 세 숫자</a:t>
+            </a:r>
+          </a:p>
+        </p:txBody>
+      </p:sp>
+    </p:spTree>
+  </p:cSld>
+  <p:clrMapOvr>
+    <a:masterClrMapping/>
+  </p:clrMapOvr>
+</p:sld>
+</file>
+
+<file path=ppt/slides/slide14.xml><?xml version="1.0" encoding="utf-8"?>
+<p:sld xmlns:a="http://schemas.openxmlformats.org/drawingml/2006/main" xmlns:p="http://schemas.openxmlformats.org/presentationml/2006/main" xmlns:r="http://schemas.openxmlformats.org/officeDocument/2006/relationships">
+  <p:cSld>
+    <p:spTree>
+      <p:nvGrpSpPr>
+        <p:cNvPr id="1" name=""/>
+        <p:cNvGrpSpPr/>
+        <p:nvPr/>
+      </p:nvGrpSpPr>
+      <p:grpSpPr/>
+      <p:sp>
+        <p:nvSpPr>
           <p:cNvPr id="2" name="Title 1"/>
           <p:cNvSpPr>
             <a:spLocks noGrp="1"/>
@@ -5976,7 +6159,7 @@
           <a:lstStyle/>
           <a:p>
             <a:r>
-              <a:t>표 2. 첫 시뮬레이션의 실행 조건</a:t>
+              <a:t>표 3. 첫 시뮬레이션의 실행 조건</a:t>
             </a:r>
           </a:p>
         </p:txBody>
@@ -6429,7 +6612,7 @@
 </p:sld>
 </file>
 
-<file path=ppt/slides/slide14.xml><?xml version="1.0" encoding="utf-8"?>
+<file path=ppt/slides/slide15.xml><?xml version="1.0" encoding="utf-8"?>
 <p:sld xmlns:a="http://schemas.openxmlformats.org/drawingml/2006/main" xmlns:p="http://schemas.openxmlformats.org/presentationml/2006/main" xmlns:r="http://schemas.openxmlformats.org/officeDocument/2006/relationships">
   <p:cSld>
     <p:spTree>
@@ -6531,7 +6714,7 @@
           <a:lstStyle/>
           <a:p>
             <a:r>
-              <a:t>표 3. sim.summary()가 반환하는 세 지표</a:t>
+              <a:t>표 4. sim.summary()가 반환하는 세 지표</a:t>
             </a:r>
           </a:p>
         </p:txBody>
@@ -7053,7 +7236,7 @@
 </p:sld>
 </file>
 
-<file path=ppt/slides/slide15.xml><?xml version="1.0" encoding="utf-8"?>
+<file path=ppt/slides/slide16.xml><?xml version="1.0" encoding="utf-8"?>
 <p:sld xmlns:a="http://schemas.openxmlformats.org/drawingml/2006/main" xmlns:p="http://schemas.openxmlformats.org/presentationml/2006/main" xmlns:r="http://schemas.openxmlformats.org/officeDocument/2006/relationships">
   <p:cSld>
     <p:spTree>
@@ -7165,7 +7348,7 @@
 </p:sld>
 </file>
 
-<file path=ppt/slides/slide16.xml><?xml version="1.0" encoding="utf-8"?>
+<file path=ppt/slides/slide17.xml><?xml version="1.0" encoding="utf-8"?>
 <p:sld xmlns:a="http://schemas.openxmlformats.org/drawingml/2006/main" xmlns:p="http://schemas.openxmlformats.org/presentationml/2006/main" xmlns:r="http://schemas.openxmlformats.org/officeDocument/2006/relationships">
   <p:cSld>
     <p:spTree>
@@ -7352,7 +7535,7 @@
 </p:sld>
 </file>
 
-<file path=ppt/slides/slide17.xml><?xml version="1.0" encoding="utf-8"?>
+<file path=ppt/slides/slide18.xml><?xml version="1.0" encoding="utf-8"?>
 <p:sld xmlns:a="http://schemas.openxmlformats.org/drawingml/2006/main" xmlns:p="http://schemas.openxmlformats.org/presentationml/2006/main" xmlns:r="http://schemas.openxmlformats.org/officeDocument/2006/relationships">
   <p:cSld>
     <p:spTree>
@@ -7489,118 +7672,6 @@
               <a:t>1004</a:t>
             </a:fld>
             <a:endParaRPr lang="en-US"/>
-          </a:p>
-        </p:txBody>
-      </p:sp>
-    </p:spTree>
-  </p:cSld>
-  <p:clrMapOvr>
-    <a:masterClrMapping/>
-  </p:clrMapOvr>
-</p:sld>
-</file>
-
-<file path=ppt/slides/slide18.xml><?xml version="1.0" encoding="utf-8"?>
-<p:sld xmlns:a="http://schemas.openxmlformats.org/drawingml/2006/main" xmlns:p="http://schemas.openxmlformats.org/presentationml/2006/main" xmlns:r="http://schemas.openxmlformats.org/officeDocument/2006/relationships">
-  <p:cSld>
-    <p:spTree>
-      <p:nvGrpSpPr>
-        <p:cNvPr id="1" name=""/>
-        <p:cNvGrpSpPr/>
-        <p:nvPr/>
-      </p:nvGrpSpPr>
-      <p:grpSpPr/>
-      <p:sp>
-        <p:nvSpPr>
-          <p:cNvPr id="2" name="Text Placeholder 1"/>
-          <p:cNvSpPr>
-            <a:spLocks noGrp="1"/>
-          </p:cNvSpPr>
-          <p:nvPr>
-            <p:ph type="body" idx="100"/>
-          </p:nvPr>
-        </p:nvSpPr>
-        <p:spPr/>
-        <p:txBody>
-          <a:bodyPr/>
-          <a:lstStyle/>
-          <a:p>
-            <a:r>
-              <a:t>06</a:t>
-            </a:r>
-          </a:p>
-        </p:txBody>
-      </p:sp>
-      <p:sp>
-        <p:nvSpPr>
-          <p:cNvPr id="3" name="Title 2"/>
-          <p:cNvSpPr>
-            <a:spLocks noGrp="1"/>
-          </p:cNvSpPr>
-          <p:nvPr>
-            <p:ph type="title" idx="101"/>
-          </p:nvPr>
-        </p:nvSpPr>
-        <p:spPr/>
-        <p:txBody>
-          <a:bodyPr/>
-          <a:lstStyle/>
-          <a:p>
-            <a:r>
-              <a:t>정리와 연습</a:t>
-            </a:r>
-          </a:p>
-        </p:txBody>
-      </p:sp>
-      <p:sp>
-        <p:nvSpPr>
-          <p:cNvPr id="4" name="Text Placeholder 3"/>
-          <p:cNvSpPr>
-            <a:spLocks noGrp="1"/>
-          </p:cNvSpPr>
-          <p:nvPr>
-            <p:ph type="body" idx="102"/>
-          </p:nvPr>
-        </p:nvSpPr>
-        <p:spPr/>
-        <p:txBody>
-          <a:bodyPr/>
-          <a:lstStyle/>
-          <a:p>
-            <a:pPr>
-              <a:spcAft>
-                <a:spcPts val="1000"/>
-              </a:spcAft>
-            </a:pPr>
-            <a:r>
-              <a:rPr>
-                <a:solidFill>
-                  <a:srgbClr val="AFAFAF"/>
-                </a:solidFill>
-              </a:rPr>
-              <a:t>6.1  </a:t>
-            </a:r>
-            <a:r>
-              <a:t>오늘의 정리</a:t>
-            </a:r>
-          </a:p>
-          <a:p>
-            <a:pPr>
-              <a:spcAft>
-                <a:spcPts val="1000"/>
-              </a:spcAft>
-            </a:pPr>
-            <a:r>
-              <a:rPr>
-                <a:solidFill>
-                  <a:srgbClr val="AFAFAF"/>
-                </a:solidFill>
-              </a:rPr>
-              <a:t>6.2  </a:t>
-            </a:r>
-            <a:r>
-              <a:t>연습과 다음 장</a:t>
-            </a:r>
           </a:p>
         </p:txBody>
       </p:sp>
@@ -7624,12 +7695,12 @@
       <p:grpSpPr/>
       <p:sp>
         <p:nvSpPr>
-          <p:cNvPr id="2" name="Title 1"/>
-          <p:cNvSpPr>
-            <a:spLocks noGrp="1"/>
-          </p:cNvSpPr>
-          <p:nvPr>
-            <p:ph type="title" idx="100"/>
+          <p:cNvPr id="2" name="Text Placeholder 1"/>
+          <p:cNvSpPr>
+            <a:spLocks noGrp="1"/>
+          </p:cNvSpPr>
+          <p:nvPr>
+            <p:ph type="body" idx="100"/>
           </p:nvPr>
         </p:nvSpPr>
         <p:spPr/>
@@ -7638,19 +7709,19 @@
           <a:lstStyle/>
           <a:p>
             <a:r>
-              <a:t>6.1 오늘의 정리</a:t>
-            </a:r>
-          </a:p>
-        </p:txBody>
-      </p:sp>
-      <p:sp>
-        <p:nvSpPr>
-          <p:cNvPr id="3" name="Text Placeholder 2"/>
-          <p:cNvSpPr>
-            <a:spLocks noGrp="1"/>
-          </p:cNvSpPr>
-          <p:nvPr>
-            <p:ph type="body" idx="101"/>
+              <a:t>06</a:t>
+            </a:r>
+          </a:p>
+        </p:txBody>
+      </p:sp>
+      <p:sp>
+        <p:nvSpPr>
+          <p:cNvPr id="3" name="Title 2"/>
+          <p:cNvSpPr>
+            <a:spLocks noGrp="1"/>
+          </p:cNvSpPr>
+          <p:nvPr>
+            <p:ph type="title" idx="101"/>
           </p:nvPr>
         </p:nvSpPr>
         <p:spPr/>
@@ -7659,7 +7730,7 @@
           <a:lstStyle/>
           <a:p>
             <a:r>
-              <a:t>6. 정리와 연습</a:t>
+              <a:t>정리와 연습</a:t>
             </a:r>
           </a:p>
         </p:txBody>
@@ -7679,76 +7750,40 @@
           <a:bodyPr/>
           <a:lstStyle/>
           <a:p>
-            <a:pPr/>
-            <a:r>
-              <a:t>smartmob을 통해 데이터와 엔진에 접근</a:t>
-            </a:r>
-          </a:p>
-          <a:p>
-            <a:pPr lvl="1"/>
-            <a:r>
-              <a:t>load_road_graph 도로망 · Dtumos 엔진</a:t>
-            </a:r>
-          </a:p>
-          <a:p>
-            <a:pPr/>
-            <a:r>
-              <a:t>엔진 연결 실패 시 녹화본으로 자동 전환 — 복습에 설치 불필요</a:t>
-            </a:r>
-          </a:p>
-          <a:p>
-            <a:pPr/>
-            <a:r>
-              <a:t>sim.summary() 요약 지표 · sim.record 분 단위 시계열</a:t>
-            </a:r>
-          </a:p>
-        </p:txBody>
-      </p:sp>
-      <p:sp>
-        <p:nvSpPr>
-          <p:cNvPr id="25" name="Slide Number Placeholder 0"/>
-          <p:cNvSpPr>
-            <a:spLocks noGrp="1"/>
-          </p:cNvSpPr>
-          <p:nvPr>
-            <p:ph type="sldNum" sz="quarter" idx="4294967295"/>
-          </p:nvPr>
-        </p:nvSpPr>
-        <p:spPr>
-          <a:xfrm>
-            <a:off x="10591495" y="6355080"/>
-            <a:ext cx="914400" cy="274320"/>
-          </a:xfrm>
-          <a:prstGeom prst="rect">
-            <a:avLst/>
-          </a:prstGeom>
-          <a:extLst>
-            <a:ext uri="{C572A759-6A51-4108-AA02-DFA0A04FC94B}">
-              <ma14:wrappingTextBoxFlag xmlns:ma14="http://schemas.microsoft.com/office/mac/drawingml/2011/main" val="0"/>
-            </a:ext>
-          </a:extLst>
-        </p:spPr>
-        <p:txBody>
-          <a:bodyPr/>
-          <a:lstStyle>
-            <a:lvl1pPr>
-              <a:defRPr sz="1000">
+            <a:pPr>
+              <a:spcAft>
+                <a:spcPts val="1000"/>
+              </a:spcAft>
+            </a:pPr>
+            <a:r>
+              <a:rPr>
                 <a:solidFill>
                   <a:srgbClr val="AFAFAF"/>
                 </a:solidFill>
-                <a:latin typeface="Pretendard Medium"/>
-                <a:ea typeface="Pretendard Medium"/>
-                <a:cs typeface="Pretendard Medium"/>
-              </a:defRPr>
-            </a:lvl1pPr>
-          </a:lstStyle>
-          <a:p>
-            <a:pPr algn="r"/>
-            <a:fld id="{F7021451-1387-4CA6-816F-3879F97B5CBC}" type="slidenum">
-              <a:rPr b="0" lang="en-US"/>
-              <a:t>1004</a:t>
-            </a:fld>
-            <a:endParaRPr lang="en-US"/>
+              </a:rPr>
+              <a:t>6.1  </a:t>
+            </a:r>
+            <a:r>
+              <a:t>오늘의 정리</a:t>
+            </a:r>
+          </a:p>
+          <a:p>
+            <a:pPr>
+              <a:spcAft>
+                <a:spcPts val="1000"/>
+              </a:spcAft>
+            </a:pPr>
+            <a:r>
+              <a:rPr>
+                <a:solidFill>
+                  <a:srgbClr val="AFAFAF"/>
+                </a:solidFill>
+              </a:rPr>
+              <a:t>6.2  </a:t>
+            </a:r>
+            <a:r>
+              <a:t>연습과 다음 장</a:t>
+            </a:r>
           </a:p>
         </p:txBody>
       </p:sp>
@@ -7920,7 +7955,7 @@
                           </a:solidFill>
                           <a:latin typeface="Pretendard Medium"/>
                         </a:rPr>
-                        <a:t>1.1 오늘 준비하는 세 가지  ·  1.2 학습 목표</a:t>
+                        <a:t>1.1 오늘 준비하는 세 가지  ·  1.2 학습 목표  ·  1.3 교재와 실습을 여는 곳</a:t>
                       </a:r>
                     </a:p>
                   </a:txBody>
@@ -8581,7 +8616,7 @@
           <a:lstStyle/>
           <a:p>
             <a:r>
-              <a:t>6.2 연습과 다음 장</a:t>
+              <a:t>6.1 오늘의 정리</a:t>
             </a:r>
           </a:p>
         </p:txBody>
@@ -8624,25 +8659,25 @@
           <a:p>
             <a:pPr/>
             <a:r>
-              <a:t>연습 0.1 ★ — 대기 승객 최대 시각과 그때 인원</a:t>
+              <a:t>smartmob을 통해 데이터와 엔진에 접근</a:t>
             </a:r>
           </a:p>
           <a:p>
             <a:pPr lvl="1"/>
             <a:r>
-              <a:t>smartmob.data.minutes_to_hhmm으로 분을 HH:MM으로 변환</a:t>
-            </a:r>
-          </a:p>
-          <a:p>
-            <a:pPr lvl="1"/>
-            <a:r>
-              <a:t>산출물: 시각 1개, 인원 1개</a:t>
+              <a:t>load_road_graph 도로망 · Dtumos 엔진</a:t>
             </a:r>
           </a:p>
           <a:p>
             <a:pPr/>
             <a:r>
-              <a:t>다음 장: 2장 도로망 데이터 — 소요시간 계산의 입력 자료</a:t>
+              <a:t>엔진 연결 실패 시 녹화본으로 자동 전환 — 복습에 설치 불필요</a:t>
+            </a:r>
+          </a:p>
+          <a:p>
+            <a:pPr/>
+            <a:r>
+              <a:t>sim.summary() 요약 지표 · sim.record 분 단위 시계열</a:t>
             </a:r>
           </a:p>
         </p:txBody>
@@ -8729,6 +8764,154 @@
           <a:lstStyle/>
           <a:p>
             <a:r>
+              <a:t>6.2 연습과 다음 장</a:t>
+            </a:r>
+          </a:p>
+        </p:txBody>
+      </p:sp>
+      <p:sp>
+        <p:nvSpPr>
+          <p:cNvPr id="3" name="Text Placeholder 2"/>
+          <p:cNvSpPr>
+            <a:spLocks noGrp="1"/>
+          </p:cNvSpPr>
+          <p:nvPr>
+            <p:ph type="body" idx="101"/>
+          </p:nvPr>
+        </p:nvSpPr>
+        <p:spPr/>
+        <p:txBody>
+          <a:bodyPr/>
+          <a:lstStyle/>
+          <a:p>
+            <a:r>
+              <a:t>6. 정리와 연습</a:t>
+            </a:r>
+          </a:p>
+        </p:txBody>
+      </p:sp>
+      <p:sp>
+        <p:nvSpPr>
+          <p:cNvPr id="4" name="Text Placeholder 3"/>
+          <p:cNvSpPr>
+            <a:spLocks noGrp="1"/>
+          </p:cNvSpPr>
+          <p:nvPr>
+            <p:ph type="body" idx="102"/>
+          </p:nvPr>
+        </p:nvSpPr>
+        <p:spPr/>
+        <p:txBody>
+          <a:bodyPr/>
+          <a:lstStyle/>
+          <a:p>
+            <a:pPr/>
+            <a:r>
+              <a:t>연습 0.1 ★ — 대기 승객 최대 시각과 그때 인원</a:t>
+            </a:r>
+          </a:p>
+          <a:p>
+            <a:pPr lvl="1"/>
+            <a:r>
+              <a:t>smartmob.data.minutes_to_hhmm으로 분을 HH:MM으로 변환</a:t>
+            </a:r>
+          </a:p>
+          <a:p>
+            <a:pPr lvl="1"/>
+            <a:r>
+              <a:t>산출물: 시각 1개, 인원 1개</a:t>
+            </a:r>
+          </a:p>
+          <a:p>
+            <a:pPr/>
+            <a:r>
+              <a:t>다음 장: 2장 도로망 데이터 — 소요시간 계산의 입력 자료</a:t>
+            </a:r>
+          </a:p>
+        </p:txBody>
+      </p:sp>
+      <p:sp>
+        <p:nvSpPr>
+          <p:cNvPr id="25" name="Slide Number Placeholder 0"/>
+          <p:cNvSpPr>
+            <a:spLocks noGrp="1"/>
+          </p:cNvSpPr>
+          <p:nvPr>
+            <p:ph type="sldNum" sz="quarter" idx="4294967295"/>
+          </p:nvPr>
+        </p:nvSpPr>
+        <p:spPr>
+          <a:xfrm>
+            <a:off x="10591495" y="6355080"/>
+            <a:ext cx="914400" cy="274320"/>
+          </a:xfrm>
+          <a:prstGeom prst="rect">
+            <a:avLst/>
+          </a:prstGeom>
+          <a:extLst>
+            <a:ext uri="{C572A759-6A51-4108-AA02-DFA0A04FC94B}">
+              <ma14:wrappingTextBoxFlag xmlns:ma14="http://schemas.microsoft.com/office/mac/drawingml/2011/main" val="0"/>
+            </a:ext>
+          </a:extLst>
+        </p:spPr>
+        <p:txBody>
+          <a:bodyPr/>
+          <a:lstStyle>
+            <a:lvl1pPr>
+              <a:defRPr sz="1000">
+                <a:solidFill>
+                  <a:srgbClr val="AFAFAF"/>
+                </a:solidFill>
+                <a:latin typeface="Pretendard Medium"/>
+                <a:ea typeface="Pretendard Medium"/>
+                <a:cs typeface="Pretendard Medium"/>
+              </a:defRPr>
+            </a:lvl1pPr>
+          </a:lstStyle>
+          <a:p>
+            <a:pPr algn="r"/>
+            <a:fld id="{F7021451-1387-4CA6-816F-3879F97B5CBC}" type="slidenum">
+              <a:rPr b="0" lang="en-US"/>
+              <a:t>1004</a:t>
+            </a:fld>
+            <a:endParaRPr lang="en-US"/>
+          </a:p>
+        </p:txBody>
+      </p:sp>
+    </p:spTree>
+  </p:cSld>
+  <p:clrMapOvr>
+    <a:masterClrMapping/>
+  </p:clrMapOvr>
+</p:sld>
+</file>
+
+<file path=ppt/slides/slide22.xml><?xml version="1.0" encoding="utf-8"?>
+<p:sld xmlns:a="http://schemas.openxmlformats.org/drawingml/2006/main" xmlns:p="http://schemas.openxmlformats.org/presentationml/2006/main" xmlns:r="http://schemas.openxmlformats.org/officeDocument/2006/relationships">
+  <p:cSld>
+    <p:spTree>
+      <p:nvGrpSpPr>
+        <p:cNvPr id="1" name=""/>
+        <p:cNvGrpSpPr/>
+        <p:nvPr/>
+      </p:nvGrpSpPr>
+      <p:grpSpPr/>
+      <p:sp>
+        <p:nvSpPr>
+          <p:cNvPr id="2" name="Title 1"/>
+          <p:cNvSpPr>
+            <a:spLocks noGrp="1"/>
+          </p:cNvSpPr>
+          <p:nvPr>
+            <p:ph type="title" idx="100"/>
+          </p:nvPr>
+        </p:nvSpPr>
+        <p:spPr/>
+        <p:txBody>
+          <a:bodyPr/>
+          <a:lstStyle/>
+          <a:p>
+            <a:r>
               <a:t>다음 주에 봅니다</a:t>
             </a:r>
           </a:p>
@@ -8886,6 +9069,24 @@
               <a:t>학습 목표</a:t>
             </a:r>
           </a:p>
+          <a:p>
+            <a:pPr>
+              <a:spcAft>
+                <a:spcPts val="1000"/>
+              </a:spcAft>
+            </a:pPr>
+            <a:r>
+              <a:rPr>
+                <a:solidFill>
+                  <a:srgbClr val="AFAFAF"/>
+                </a:solidFill>
+              </a:rPr>
+              <a:t>1.3  </a:t>
+            </a:r>
+            <a:r>
+              <a:t>교재와 실습을 여는 곳</a:t>
+            </a:r>
+          </a:p>
         </p:txBody>
       </p:sp>
     </p:spTree>
@@ -9216,12 +9417,12 @@
       <p:grpSpPr/>
       <p:sp>
         <p:nvSpPr>
-          <p:cNvPr id="2" name="Text Placeholder 1"/>
-          <p:cNvSpPr>
-            <a:spLocks noGrp="1"/>
-          </p:cNvSpPr>
-          <p:nvPr>
-            <p:ph type="body" idx="100"/>
+          <p:cNvPr id="2" name="Title 1"/>
+          <p:cNvSpPr>
+            <a:spLocks noGrp="1"/>
+          </p:cNvSpPr>
+          <p:nvPr>
+            <p:ph type="title" idx="100"/>
           </p:nvPr>
         </p:nvSpPr>
         <p:spPr/>
@@ -9230,19 +9431,19 @@
           <a:lstStyle/>
           <a:p>
             <a:r>
-              <a:t>02</a:t>
-            </a:r>
-          </a:p>
-        </p:txBody>
-      </p:sp>
-      <p:sp>
-        <p:nvSpPr>
-          <p:cNvPr id="3" name="Title 2"/>
-          <p:cNvSpPr>
-            <a:spLocks noGrp="1"/>
-          </p:cNvSpPr>
-          <p:nvPr>
-            <p:ph type="title" idx="101"/>
+              <a:t>1.3 교재와 실습을 여는 곳</a:t>
+            </a:r>
+          </a:p>
+        </p:txBody>
+      </p:sp>
+      <p:sp>
+        <p:nvSpPr>
+          <p:cNvPr id="3" name="Text Placeholder 2"/>
+          <p:cNvSpPr>
+            <a:spLocks noGrp="1"/>
+          </p:cNvSpPr>
+          <p:nvPr>
+            <p:ph type="body" idx="101"/>
           </p:nvPr>
         </p:nvSpPr>
         <p:spPr/>
@@ -9251,7 +9452,7 @@
           <a:lstStyle/>
           <a:p>
             <a:r>
-              <a:t>교재 0.1–0.2 설치와 데이터</a:t>
+              <a:t>1. 도입과 학습 목표</a:t>
             </a:r>
           </a:p>
         </p:txBody>
@@ -9271,40 +9472,335 @@
           <a:bodyPr/>
           <a:lstStyle/>
           <a:p>
-            <a:pPr>
-              <a:spcAft>
-                <a:spcPts val="1000"/>
-              </a:spcAft>
-            </a:pPr>
-            <a:r>
-              <a:rPr>
+            <a:pPr/>
+            <a:r>
+              <a:t>저장소: github.com/jihoyeo/mobility-simulation-book — blob/main 아래 경로</a:t>
+            </a:r>
+          </a:p>
+          <a:p>
+            <a:pPr/>
+            <a:r>
+              <a:t>노트북 실행: jupyter lab labs/ch00_setup.ipynb</a:t>
+            </a:r>
+          </a:p>
+          <a:p>
+            <a:pPr/>
+            <a:r>
+              <a:t>진행 순서: 슬라이드 개요 → 교재 본문 → 실습 노트북</a:t>
+            </a:r>
+          </a:p>
+        </p:txBody>
+      </p:sp>
+      <p:sp>
+        <p:nvSpPr>
+          <p:cNvPr id="5" name="Text Placeholder 4"/>
+          <p:cNvSpPr>
+            <a:spLocks noGrp="1"/>
+          </p:cNvSpPr>
+          <p:nvPr>
+            <p:ph type="body" idx="103"/>
+          </p:nvPr>
+        </p:nvSpPr>
+        <p:spPr/>
+        <p:txBody>
+          <a:bodyPr/>
+          <a:lstStyle/>
+          <a:p>
+            <a:r>
+              <a:t>표 1. 오늘 여는 파일과 경로</a:t>
+            </a:r>
+          </a:p>
+        </p:txBody>
+      </p:sp>
+      <p:graphicFrame>
+        <p:nvGraphicFramePr>
+          <p:cNvPr id="6" name="Table Placeholder 5"/>
+          <p:cNvGraphicFramePr>
+            <a:graphicFrameLocks noGrp="1"/>
+          </p:cNvGraphicFramePr>
+          <p:nvPr>
+            <p:ph type="tbl" idx="104"/>
+          </p:nvPr>
+        </p:nvGraphicFramePr>
+        <p:xfrm>
+          <a:off x="4937760" y="1828800"/>
+          <a:ext cx="6565392" cy="1676400"/>
+        </p:xfrm>
+        <a:graphic>
+          <a:graphicData uri="http://schemas.openxmlformats.org/drawingml/2006/table">
+            <a:tbl>
+              <a:tblPr firstRow="0" bandRow="0" firstCol="0" lastRow="0" lastCol="0" bandCol="0"/>
+              <a:tblGrid>
+                <a:gridCol w="3282696"/>
+                <a:gridCol w="3282696"/>
+              </a:tblGrid>
+              <a:tr h="406400">
+                <a:tc>
+                  <a:txBody>
+                    <a:bodyPr/>
+                    <a:lstStyle/>
+                    <a:p>
+                      <a:r>
+                        <a:rPr sz="1300" b="0">
+                          <a:solidFill>
+                            <a:srgbClr val="FFFFFF"/>
+                          </a:solidFill>
+                          <a:latin typeface="Pretendard Medium"/>
+                        </a:rPr>
+                        <a:t>자료</a:t>
+                      </a:r>
+                    </a:p>
+                  </a:txBody>
+                  <a:tcPr marL="101600" marR="101600" marT="76200" marB="76200" anchor="ctr">
+                    <a:solidFill>
+                      <a:srgbClr val="000000"/>
+                    </a:solidFill>
+                    <a:lnL w="0">
+                      <a:noFill/>
+                    </a:lnL>
+                    <a:lnR w="0">
+                      <a:noFill/>
+                    </a:lnR>
+                    <a:lnT w="0">
+                      <a:noFill/>
+                    </a:lnT>
+                    <a:lnB w="0">
+                      <a:noFill/>
+                    </a:lnB>
+                  </a:tcPr>
+                </a:tc>
+                <a:tc>
+                  <a:txBody>
+                    <a:bodyPr/>
+                    <a:lstStyle/>
+                    <a:p>
+                      <a:r>
+                        <a:rPr sz="1300" b="0">
+                          <a:solidFill>
+                            <a:srgbClr val="FFFFFF"/>
+                          </a:solidFill>
+                          <a:latin typeface="Pretendard Medium"/>
+                        </a:rPr>
+                        <a:t>경로</a:t>
+                      </a:r>
+                    </a:p>
+                  </a:txBody>
+                  <a:tcPr marL="101600" marR="101600" marT="76200" marB="76200" anchor="ctr">
+                    <a:solidFill>
+                      <a:srgbClr val="000000"/>
+                    </a:solidFill>
+                    <a:lnL w="0">
+                      <a:noFill/>
+                    </a:lnL>
+                    <a:lnR w="0">
+                      <a:noFill/>
+                    </a:lnR>
+                    <a:lnT w="0">
+                      <a:noFill/>
+                    </a:lnT>
+                    <a:lnB w="0">
+                      <a:noFill/>
+                    </a:lnB>
+                  </a:tcPr>
+                </a:tc>
+              </a:tr>
+              <a:tr h="635000">
+                <a:tc>
+                  <a:txBody>
+                    <a:bodyPr/>
+                    <a:lstStyle/>
+                    <a:p>
+                      <a:r>
+                        <a:rPr sz="1300" b="1">
+                          <a:solidFill>
+                            <a:srgbClr val="000000"/>
+                          </a:solidFill>
+                          <a:latin typeface="Pretendard"/>
+                        </a:rPr>
+                        <a:t>교재 원고</a:t>
+                      </a:r>
+                    </a:p>
+                  </a:txBody>
+                  <a:tcPr marL="101600" marR="101600" marT="101600" marB="101600" anchor="ctr">
+                    <a:solidFill>
+                      <a:srgbClr val="FFFFFF"/>
+                    </a:solidFill>
+                    <a:lnL w="0">
+                      <a:noFill/>
+                    </a:lnL>
+                    <a:lnR w="0">
+                      <a:noFill/>
+                    </a:lnR>
+                    <a:lnT w="0">
+                      <a:noFill/>
+                    </a:lnT>
+                    <a:lnB w="9525">
+                      <a:solidFill>
+                        <a:srgbClr val="E2E2E2"/>
+                      </a:solidFill>
+                    </a:lnB>
+                  </a:tcPr>
+                </a:tc>
+                <a:tc>
+                  <a:txBody>
+                    <a:bodyPr/>
+                    <a:lstStyle/>
+                    <a:p>
+                      <a:r>
+                        <a:rPr sz="1300" b="0">
+                          <a:solidFill>
+                            <a:srgbClr val="5E5E5E"/>
+                          </a:solidFill>
+                          <a:latin typeface="Pretendard Medium"/>
+                        </a:rPr>
+                        <a:t>ko/ch00_setup.md</a:t>
+                      </a:r>
+                    </a:p>
+                  </a:txBody>
+                  <a:tcPr marL="101600" marR="101600" marT="101600" marB="101600" anchor="ctr">
+                    <a:solidFill>
+                      <a:srgbClr val="FFFFFF"/>
+                    </a:solidFill>
+                    <a:lnL w="0">
+                      <a:noFill/>
+                    </a:lnL>
+                    <a:lnR w="0">
+                      <a:noFill/>
+                    </a:lnR>
+                    <a:lnT w="0">
+                      <a:noFill/>
+                    </a:lnT>
+                    <a:lnB w="9525">
+                      <a:solidFill>
+                        <a:srgbClr val="E2E2E2"/>
+                      </a:solidFill>
+                    </a:lnB>
+                  </a:tcPr>
+                </a:tc>
+              </a:tr>
+              <a:tr h="635000">
+                <a:tc>
+                  <a:txBody>
+                    <a:bodyPr/>
+                    <a:lstStyle/>
+                    <a:p>
+                      <a:r>
+                        <a:rPr sz="1300" b="1">
+                          <a:solidFill>
+                            <a:srgbClr val="000000"/>
+                          </a:solidFill>
+                          <a:latin typeface="Pretendard"/>
+                        </a:rPr>
+                        <a:t>실습 노트북</a:t>
+                      </a:r>
+                    </a:p>
+                  </a:txBody>
+                  <a:tcPr marL="101600" marR="101600" marT="101600" marB="101600" anchor="ctr">
+                    <a:solidFill>
+                      <a:srgbClr val="FFFFFF"/>
+                    </a:solidFill>
+                    <a:lnL w="0">
+                      <a:noFill/>
+                    </a:lnL>
+                    <a:lnR w="0">
+                      <a:noFill/>
+                    </a:lnR>
+                    <a:lnT w="0">
+                      <a:noFill/>
+                    </a:lnT>
+                    <a:lnB w="9525">
+                      <a:solidFill>
+                        <a:srgbClr val="E2E2E2"/>
+                      </a:solidFill>
+                    </a:lnB>
+                  </a:tcPr>
+                </a:tc>
+                <a:tc>
+                  <a:txBody>
+                    <a:bodyPr/>
+                    <a:lstStyle/>
+                    <a:p>
+                      <a:r>
+                        <a:rPr sz="1300" b="0">
+                          <a:solidFill>
+                            <a:srgbClr val="5E5E5E"/>
+                          </a:solidFill>
+                          <a:latin typeface="Pretendard Medium"/>
+                        </a:rPr>
+                        <a:t>labs/ch00_setup.ipynb</a:t>
+                      </a:r>
+                    </a:p>
+                  </a:txBody>
+                  <a:tcPr marL="101600" marR="101600" marT="101600" marB="101600" anchor="ctr">
+                    <a:solidFill>
+                      <a:srgbClr val="FFFFFF"/>
+                    </a:solidFill>
+                    <a:lnL w="0">
+                      <a:noFill/>
+                    </a:lnL>
+                    <a:lnR w="0">
+                      <a:noFill/>
+                    </a:lnR>
+                    <a:lnT w="0">
+                      <a:noFill/>
+                    </a:lnT>
+                    <a:lnB w="9525">
+                      <a:solidFill>
+                        <a:srgbClr val="E2E2E2"/>
+                      </a:solidFill>
+                    </a:lnB>
+                  </a:tcPr>
+                </a:tc>
+              </a:tr>
+            </a:tbl>
+          </a:graphicData>
+        </a:graphic>
+      </p:graphicFrame>
+      <p:sp>
+        <p:nvSpPr>
+          <p:cNvPr id="25" name="Slide Number Placeholder 0"/>
+          <p:cNvSpPr>
+            <a:spLocks noGrp="1"/>
+          </p:cNvSpPr>
+          <p:nvPr>
+            <p:ph type="sldNum" sz="quarter" idx="4294967295"/>
+          </p:nvPr>
+        </p:nvSpPr>
+        <p:spPr>
+          <a:xfrm>
+            <a:off x="10591495" y="6355080"/>
+            <a:ext cx="914400" cy="274320"/>
+          </a:xfrm>
+          <a:prstGeom prst="rect">
+            <a:avLst/>
+          </a:prstGeom>
+          <a:extLst>
+            <a:ext uri="{C572A759-6A51-4108-AA02-DFA0A04FC94B}">
+              <ma14:wrappingTextBoxFlag xmlns:ma14="http://schemas.microsoft.com/office/mac/drawingml/2011/main" val="0"/>
+            </a:ext>
+          </a:extLst>
+        </p:spPr>
+        <p:txBody>
+          <a:bodyPr/>
+          <a:lstStyle>
+            <a:lvl1pPr>
+              <a:defRPr sz="1000">
                 <a:solidFill>
                   <a:srgbClr val="AFAFAF"/>
                 </a:solidFill>
-              </a:rPr>
-              <a:t>2.1  </a:t>
-            </a:r>
-            <a:r>
-              <a:t>파이썬 환경과 의존성</a:t>
-            </a:r>
-          </a:p>
-          <a:p>
-            <a:pPr>
-              <a:spcAft>
-                <a:spcPts val="1000"/>
-              </a:spcAft>
-            </a:pPr>
-            <a:r>
-              <a:rPr>
-                <a:solidFill>
-                  <a:srgbClr val="AFAFAF"/>
-                </a:solidFill>
-              </a:rPr>
-              <a:t>2.2  </a:t>
-            </a:r>
-            <a:r>
-              <a:t>실습 도시 하남시</a:t>
-            </a:r>
+                <a:latin typeface="Pretendard Medium"/>
+                <a:ea typeface="Pretendard Medium"/>
+                <a:cs typeface="Pretendard Medium"/>
+              </a:defRPr>
+            </a:lvl1pPr>
+          </a:lstStyle>
+          <a:p>
+            <a:pPr algn="r"/>
+            <a:fld id="{F7021451-1387-4CA6-816F-3879F97B5CBC}" type="slidenum">
+              <a:rPr b="0" lang="en-US"/>
+              <a:t>1008</a:t>
+            </a:fld>
+            <a:endParaRPr lang="en-US"/>
           </a:p>
         </p:txBody>
       </p:sp>
@@ -9328,12 +9824,12 @@
       <p:grpSpPr/>
       <p:sp>
         <p:nvSpPr>
-          <p:cNvPr id="2" name="Title 1"/>
-          <p:cNvSpPr>
-            <a:spLocks noGrp="1"/>
-          </p:cNvSpPr>
-          <p:nvPr>
-            <p:ph type="title" idx="100"/>
+          <p:cNvPr id="2" name="Text Placeholder 1"/>
+          <p:cNvSpPr>
+            <a:spLocks noGrp="1"/>
+          </p:cNvSpPr>
+          <p:nvPr>
+            <p:ph type="body" idx="100"/>
           </p:nvPr>
         </p:nvSpPr>
         <p:spPr/>
@@ -9342,19 +9838,19 @@
           <a:lstStyle/>
           <a:p>
             <a:r>
-              <a:t>2.1 파이썬 환경과 의존성</a:t>
-            </a:r>
-          </a:p>
-        </p:txBody>
-      </p:sp>
-      <p:sp>
-        <p:nvSpPr>
-          <p:cNvPr id="3" name="Text Placeholder 2"/>
-          <p:cNvSpPr>
-            <a:spLocks noGrp="1"/>
-          </p:cNvSpPr>
-          <p:nvPr>
-            <p:ph type="body" idx="101"/>
+              <a:t>02</a:t>
+            </a:r>
+          </a:p>
+        </p:txBody>
+      </p:sp>
+      <p:sp>
+        <p:nvSpPr>
+          <p:cNvPr id="3" name="Title 2"/>
+          <p:cNvSpPr>
+            <a:spLocks noGrp="1"/>
+          </p:cNvSpPr>
+          <p:nvPr>
+            <p:ph type="title" idx="101"/>
           </p:nvPr>
         </p:nvSpPr>
         <p:spPr/>
@@ -9363,7 +9859,7 @@
           <a:lstStyle/>
           <a:p>
             <a:r>
-              <a:t>2. 교재 0.1–0.2 설치와 데이터</a:t>
+              <a:t>교재 0.1–0.2 설치와 데이터</a:t>
             </a:r>
           </a:p>
         </p:txBody>
@@ -9383,82 +9879,40 @@
           <a:bodyPr/>
           <a:lstStyle/>
           <a:p>
-            <a:pPr/>
-            <a:r>
-              <a:t>파이썬 3.11 · 저장소 복제 후 pip install -r requirements.txt</a:t>
-            </a:r>
-          </a:p>
-          <a:p>
-            <a:pPr lvl="1"/>
-            <a:r>
-              <a:t>버전 고정 — 같은 버전이면 교재와 같은 그림</a:t>
-            </a:r>
-          </a:p>
-          <a:p>
-            <a:pPr/>
-            <a:r>
-              <a:t>9장 예측 모델은 requirements-heavy.txt 추가</a:t>
-            </a:r>
-          </a:p>
-          <a:p>
-            <a:pPr lvl="1"/>
-            <a:r>
-              <a:t>그 주에 설치해도 무방</a:t>
-            </a:r>
-          </a:p>
-          <a:p>
-            <a:pPr/>
-            <a:r>
-              <a:t>코랩: 각 장 상단 Colab 배지 → 첫 셀에서 smartmob.colab.bootstrap()</a:t>
-            </a:r>
-          </a:p>
-        </p:txBody>
-      </p:sp>
-      <p:sp>
-        <p:nvSpPr>
-          <p:cNvPr id="25" name="Slide Number Placeholder 0"/>
-          <p:cNvSpPr>
-            <a:spLocks noGrp="1"/>
-          </p:cNvSpPr>
-          <p:nvPr>
-            <p:ph type="sldNum" sz="quarter" idx="4294967295"/>
-          </p:nvPr>
-        </p:nvSpPr>
-        <p:spPr>
-          <a:xfrm>
-            <a:off x="10591495" y="6355080"/>
-            <a:ext cx="914400" cy="274320"/>
-          </a:xfrm>
-          <a:prstGeom prst="rect">
-            <a:avLst/>
-          </a:prstGeom>
-          <a:extLst>
-            <a:ext uri="{C572A759-6A51-4108-AA02-DFA0A04FC94B}">
-              <ma14:wrappingTextBoxFlag xmlns:ma14="http://schemas.microsoft.com/office/mac/drawingml/2011/main" val="0"/>
-            </a:ext>
-          </a:extLst>
-        </p:spPr>
-        <p:txBody>
-          <a:bodyPr/>
-          <a:lstStyle>
-            <a:lvl1pPr>
-              <a:defRPr sz="1000">
+            <a:pPr>
+              <a:spcAft>
+                <a:spcPts val="1000"/>
+              </a:spcAft>
+            </a:pPr>
+            <a:r>
+              <a:rPr>
                 <a:solidFill>
                   <a:srgbClr val="AFAFAF"/>
                 </a:solidFill>
-                <a:latin typeface="Pretendard Medium"/>
-                <a:ea typeface="Pretendard Medium"/>
-                <a:cs typeface="Pretendard Medium"/>
-              </a:defRPr>
-            </a:lvl1pPr>
-          </a:lstStyle>
-          <a:p>
-            <a:pPr algn="r"/>
-            <a:fld id="{F7021451-1387-4CA6-816F-3879F97B5CBC}" type="slidenum">
-              <a:rPr b="0" lang="en-US"/>
-              <a:t>1004</a:t>
-            </a:fld>
-            <a:endParaRPr lang="en-US"/>
+              </a:rPr>
+              <a:t>2.1  </a:t>
+            </a:r>
+            <a:r>
+              <a:t>파이썬 환경과 의존성</a:t>
+            </a:r>
+          </a:p>
+          <a:p>
+            <a:pPr>
+              <a:spcAft>
+                <a:spcPts val="1000"/>
+              </a:spcAft>
+            </a:pPr>
+            <a:r>
+              <a:rPr>
+                <a:solidFill>
+                  <a:srgbClr val="AFAFAF"/>
+                </a:solidFill>
+              </a:rPr>
+              <a:t>2.2  </a:t>
+            </a:r>
+            <a:r>
+              <a:t>실습 도시 하남시</a:t>
+            </a:r>
           </a:p>
         </p:txBody>
       </p:sp>
@@ -9496,7 +9950,7 @@
           <a:lstStyle/>
           <a:p>
             <a:r>
-              <a:t>2.2 실습 도시 하남시</a:t>
+              <a:t>2.1 파이썬 환경과 의존성</a:t>
             </a:r>
           </a:p>
         </p:txBody>
@@ -9539,37 +9993,31 @@
           <a:p>
             <a:pPr/>
             <a:r>
-              <a:t>선정 이유: 서울 인접 + 노트북에서 다룰 만한 크기</a:t>
+              <a:t>파이썬 3.11 · 저장소 복제 후 pip install -r requirements.txt</a:t>
+            </a:r>
+          </a:p>
+          <a:p>
+            <a:pPr lvl="1"/>
+            <a:r>
+              <a:t>버전 고정 — 같은 버전이면 교재와 같은 그림</a:t>
             </a:r>
           </a:p>
           <a:p>
             <a:pPr/>
             <a:r>
-              <a:t>저장소에 포함된 데이터</a:t>
+              <a:t>9장 예측 모델은 requirements-heavy.txt 추가</a:t>
             </a:r>
           </a:p>
           <a:p>
             <a:pPr lvl="1"/>
             <a:r>
-              <a:t>도로망 노드·엣지 (parquet)</a:t>
-            </a:r>
-          </a:p>
-          <a:p>
-            <a:pPr lvl="1"/>
-            <a:r>
-              <a:t>통행 수요 (demand.csv)</a:t>
+              <a:t>그 주에 설치해도 무방</a:t>
             </a:r>
           </a:p>
           <a:p>
             <a:pPr/>
             <a:r>
-              <a:t>load_road_graph("hanam", modes=("drive",)) → 노드 12,566 · 엣지 28,589</a:t>
-            </a:r>
-          </a:p>
-          <a:p>
-            <a:pPr/>
-            <a:r>
-              <a:t>노드 기준: 교차로와 막다른 길만 — 사이 직선 구간은 엣지 하나</a:t>
+              <a:t>코랩: 각 장 상단 Colab 배지 → 첫 셀에서 smartmob.colab.bootstrap()</a:t>
             </a:r>
           </a:p>
         </p:txBody>
@@ -9642,12 +10090,12 @@
       <p:grpSpPr/>
       <p:sp>
         <p:nvSpPr>
-          <p:cNvPr id="2" name="Text Placeholder 1"/>
-          <p:cNvSpPr>
-            <a:spLocks noGrp="1"/>
-          </p:cNvSpPr>
-          <p:nvPr>
-            <p:ph type="body" idx="100"/>
+          <p:cNvPr id="2" name="Title 1"/>
+          <p:cNvSpPr>
+            <a:spLocks noGrp="1"/>
+          </p:cNvSpPr>
+          <p:nvPr>
+            <p:ph type="title" idx="100"/>
           </p:nvPr>
         </p:nvSpPr>
         <p:spPr/>
@@ -9656,19 +10104,19 @@
           <a:lstStyle/>
           <a:p>
             <a:r>
-              <a:t>03</a:t>
-            </a:r>
-          </a:p>
-        </p:txBody>
-      </p:sp>
-      <p:sp>
-        <p:nvSpPr>
-          <p:cNvPr id="3" name="Title 2"/>
-          <p:cNvSpPr>
-            <a:spLocks noGrp="1"/>
-          </p:cNvSpPr>
-          <p:nvPr>
-            <p:ph type="title" idx="101"/>
+              <a:t>2.2 실습 도시 하남시</a:t>
+            </a:r>
+          </a:p>
+        </p:txBody>
+      </p:sp>
+      <p:sp>
+        <p:nvSpPr>
+          <p:cNvPr id="3" name="Text Placeholder 2"/>
+          <p:cNvSpPr>
+            <a:spLocks noGrp="1"/>
+          </p:cNvSpPr>
+          <p:nvPr>
+            <p:ph type="body" idx="101"/>
           </p:nvPr>
         </p:nvSpPr>
         <p:spPr/>
@@ -9677,7 +10125,7 @@
           <a:lstStyle/>
           <a:p>
             <a:r>
-              <a:t>교재 0.3 엔진 연결</a:t>
+              <a:t>2. 교재 0.1–0.2 설치와 데이터</a:t>
             </a:r>
           </a:p>
         </p:txBody>
@@ -9697,40 +10145,88 @@
           <a:bodyPr/>
           <a:lstStyle/>
           <a:p>
-            <a:pPr>
-              <a:spcAft>
-                <a:spcPts val="1000"/>
-              </a:spcAft>
-            </a:pPr>
-            <a:r>
-              <a:rPr>
+            <a:pPr/>
+            <a:r>
+              <a:t>선정 이유: 서울 인접 + 노트북에서 다룰 만한 크기</a:t>
+            </a:r>
+          </a:p>
+          <a:p>
+            <a:pPr/>
+            <a:r>
+              <a:t>저장소에 포함된 데이터</a:t>
+            </a:r>
+          </a:p>
+          <a:p>
+            <a:pPr lvl="1"/>
+            <a:r>
+              <a:t>도로망 노드·엣지 (parquet)</a:t>
+            </a:r>
+          </a:p>
+          <a:p>
+            <a:pPr lvl="1"/>
+            <a:r>
+              <a:t>통행 수요 (demand.csv)</a:t>
+            </a:r>
+          </a:p>
+          <a:p>
+            <a:pPr/>
+            <a:r>
+              <a:t>load_road_graph("hanam", modes=("drive",)) → 노드 12,566 · 엣지 28,589</a:t>
+            </a:r>
+          </a:p>
+          <a:p>
+            <a:pPr/>
+            <a:r>
+              <a:t>노드 기준: 교차로와 막다른 길만 — 사이 직선 구간은 엣지 하나</a:t>
+            </a:r>
+          </a:p>
+        </p:txBody>
+      </p:sp>
+      <p:sp>
+        <p:nvSpPr>
+          <p:cNvPr id="25" name="Slide Number Placeholder 0"/>
+          <p:cNvSpPr>
+            <a:spLocks noGrp="1"/>
+          </p:cNvSpPr>
+          <p:nvPr>
+            <p:ph type="sldNum" sz="quarter" idx="4294967295"/>
+          </p:nvPr>
+        </p:nvSpPr>
+        <p:spPr>
+          <a:xfrm>
+            <a:off x="10591495" y="6355080"/>
+            <a:ext cx="914400" cy="274320"/>
+          </a:xfrm>
+          <a:prstGeom prst="rect">
+            <a:avLst/>
+          </a:prstGeom>
+          <a:extLst>
+            <a:ext uri="{C572A759-6A51-4108-AA02-DFA0A04FC94B}">
+              <ma14:wrappingTextBoxFlag xmlns:ma14="http://schemas.microsoft.com/office/mac/drawingml/2011/main" val="0"/>
+            </a:ext>
+          </a:extLst>
+        </p:spPr>
+        <p:txBody>
+          <a:bodyPr/>
+          <a:lstStyle>
+            <a:lvl1pPr>
+              <a:defRPr sz="1000">
                 <a:solidFill>
                   <a:srgbClr val="AFAFAF"/>
                 </a:solidFill>
-              </a:rPr>
-              <a:t>3.1  </a:t>
-            </a:r>
-            <a:r>
-              <a:t>DTUMOS에 붙는 세 가지 방법</a:t>
-            </a:r>
-          </a:p>
-          <a:p>
-            <a:pPr>
-              <a:spcAft>
-                <a:spcPts val="1000"/>
-              </a:spcAft>
-            </a:pPr>
-            <a:r>
-              <a:rPr>
-                <a:solidFill>
-                  <a:srgbClr val="AFAFAF"/>
-                </a:solidFill>
-              </a:rPr>
-              <a:t>3.2  </a:t>
-            </a:r>
-            <a:r>
-              <a:t>녹화본의 범위</a:t>
-            </a:r>
+                <a:latin typeface="Pretendard Medium"/>
+                <a:ea typeface="Pretendard Medium"/>
+                <a:cs typeface="Pretendard Medium"/>
+              </a:defRPr>
+            </a:lvl1pPr>
+          </a:lstStyle>
+          <a:p>
+            <a:pPr algn="r"/>
+            <a:fld id="{F7021451-1387-4CA6-816F-3879F97B5CBC}" type="slidenum">
+              <a:rPr b="0" lang="en-US"/>
+              <a:t>1004</a:t>
+            </a:fld>
+            <a:endParaRPr lang="en-US"/>
           </a:p>
         </p:txBody>
       </p:sp>

--- a/slides/week01/ch00_setup.pptx
+++ b/slides/week01/ch00_setup.pptx
@@ -592,7 +592,7 @@
           <a:lstStyle/>
           <a:p>
             <a:r>
-              <a:t>세 번째 숫자가 다음 질문을 만든다. 이 질문에 답하려면 같은 수요와 같은 도로망에서 차량 대수만 변경해 다시 실행해야 하고, 그 도구를 이 책에서 만든다.</a:t>
+              <a:t>평균 대기시간은 짧지만 차량 가동률은 27%입니다. 같은 수요와 도로망에서 차량을 40대로 줄였을 때 대기시간과 서비스율이 어떻게 달라지는지 비교할 필요가 있습니다. 이 비교에 필요한 시뮬레이터를 이후 장에서 단계별로 구현합니다.</a:t>
             </a:r>
           </a:p>
         </p:txBody>
@@ -662,7 +662,7 @@
           <a:lstStyle/>
           <a:p>
             <a:r>
-              <a:t>plot_record(sim.record)로 그린다. 그림을 먼저 보여주고 마지막 30분에서 무엇이 이상한지 학생이 먼저 찾게 한다.</a:t>
+              <a:t>plot_record(sim.record)로 만든 그림입니다. 설명하기 전에 학생들에게 마지막 30분의 변화를 먼저 찾아보도록 요청합니다.</a:t>
             </a:r>
           </a:p>
         </p:txBody>
@@ -732,7 +732,7 @@
           <a:lstStyle/>
           <a:p>
             <a:r>
-              <a:t>시뮬레이션이 차량 80대를 항상 80대로 다루지 않는다는 뜻이다. 이런 것을 미리 알고 있어야 결과를 잘못 읽지 않는다.</a:t>
+              <a:t>fleet_size가 80이어도 모든 차량이 전 시간대에 근무하는 것은 아닙니다. 결과를 해석할 때는 전체 차량 수와 해당 시각의 근무 차량 수를 구분해야 합니다.</a:t>
             </a:r>
           </a:p>
         </p:txBody>
@@ -802,7 +802,7 @@
           <a:lstStyle/>
           <a:p>
             <a:r>
-              <a:t>학습 목표 네 가지가 각자 노트북에서 확인됐는지 손을 들게 해서 점검한다.</a:t>
+              <a:t>학습 목표 네 가지를 각자 노트북에서 확인했는지 점검합니다. 설치가 끝나지 않은 학생의 오류 유형과 후속 지원 방법도 확인합니다.</a:t>
             </a:r>
           </a:p>
         </p:txBody>
@@ -872,7 +872,7 @@
           <a:lstStyle/>
           <a:p>
             <a:r>
-              <a:t>확인 질문: 서비스율 1.0인데 왜 차량을 줄이자는 이야기가 나오는가. 가동률 0.27과 연결해서 답하게 한다.</a:t>
+              <a:t>서비스율이 1.0인데도 차량 감축을 검토하는 이유를 질문합니다. 평균 대기시간뿐 아니라 가동률 0.27도 함께 해석하도록 유도합니다.</a:t>
             </a:r>
           </a:p>
         </p:txBody>
@@ -942,7 +942,7 @@
           <a:lstStyle/>
           <a:p>
             <a:r>
-              <a:t>슬라이드는 중간중간 몇 장만 사용하고, 설치부터는 각자 노트북에 교재 0장을 표시한 상태로 함께 진행한다.</a:t>
+              <a:t>슬라이드는 실습 단계가 바뀔 때 사용합니다. 설치를 시작한 뒤에는 교재 0장을 화면에 표시하고 학생들이 각자 명령을 실행하도록 안내합니다.</a:t>
             </a:r>
           </a:p>
         </p:txBody>
@@ -1012,7 +1012,7 @@
           <a:lstStyle/>
           <a:p>
             <a:r>
-              <a:t>교재 0장 학습 목표와 같다. 오늘 끝에 네 가지가 각자 노트북에서 확인되어야 다음 주 진도가 나간다.</a:t>
+              <a:t>교재 0장의 학습 목표와 같습니다. 수업을 마칠 때 네 항목을 각자 노트북에서 확인합니다. 완료하지 못한 학생은 다음 주 수업 전까지 설치를 마쳐야 합니다.</a:t>
             </a:r>
           </a:p>
         </p:txBody>
@@ -1152,7 +1152,7 @@
           <a:lstStyle/>
           <a:p>
             <a:r>
-              <a:t>설치 명령은 교재 0.1에 그대로 있다. 화면에 표시한 상태로 한 줄씩 함께 입력한다. 막히는 사람은 손을 들게 하고, 끝난 사람이 옆자리를 돕게 한다.</a:t>
+              <a:t>설치 명령은 교재 0.1을 화면에 표시하고 한 줄씩 함께 실행합니다. 오류가 발생하면 명령과 오류 메시지를 확인하고, 먼저 설치를 마친 학생은 주변 학생의 진행을 도와주도록 안내합니다.</a:t>
             </a:r>
           </a:p>
         </p:txBody>
@@ -1222,7 +1222,7 @@
           <a:lstStyle/>
           <a:p>
             <a:r>
-              <a:t>하남시 전체치고 노드가 적어 보이는 이유를 여기서 한 번 설명한다. modes 인자가 왜 필요한지는 2장에서 다루므로 오늘은 넘어간다.</a:t>
+              <a:t>하남시 전체 도로망인데도 노드 수가 적어 보이는 이유를 설명합니다. 도로가 꺾이는 지점까지 모두 노드로 두지 않고, 교차로와 막다른 길만 노드로 사용하기 때문입니다. modes 인자는 2장에서 자세히 다룹니다.</a:t>
             </a:r>
           </a:p>
         </p:txBody>
@@ -1292,7 +1292,7 @@
           <a:lstStyle/>
           <a:p>
             <a:r>
-              <a:t>공용 서버 주소와 팀별 포트는 단톡방에 올린다. 저장소의 data/fixtures/에 실제 실행 결과가 녹화되어 있고, 연결이 안 되면 그것을 대신 반환한다.</a:t>
+              <a:t>공용 서버 주소와 팀별 포트는 단톡방으로 안내합니다. 서버에 연결할 수 없으면 저장소의 data/fixtures/에 보관된 실제 실행 결과를 대신 반환합니다.</a:t>
             </a:r>
           </a:p>
         </p:txBody>
@@ -1362,7 +1362,7 @@
           <a:lstStyle/>
           <a:p>
             <a:r>
-              <a:t>이 구분을 지금 분명히 해 둬야 나중에 학생들이 FixtureMissing을 코드 버그로 오해하지 않는다.</a:t>
+              <a:t>학생들이 FixtureMissing을 코드 오류로 오해하지 않도록 녹화본의 범위를 설명합니다. 교재에 없는 조건으로 실행하려면 실제 서버에 연결해야 합니다.</a:t>
             </a:r>
           </a:p>
         </p:txBody>
@@ -1432,7 +1432,7 @@
           <a:lstStyle/>
           <a:p>
             <a:r>
-              <a:t>인자 이름과 값을 한 번 읽고 넘어간다. 시간을 분 단위 정수로 다루는 규칙은 11장 시뮬레이션 루프까지 그대로 간다.</a:t>
+              <a:t>각 인자와 값을 교재의 실행 코드에서 확인합니다. 시간을 자정부터 지난 분을 나타내는 정수로 표현하는 규칙은 11장의 시뮬레이션 루프에서도 그대로 사용합니다.</a:t>
             </a:r>
           </a:p>
         </p:txBody>
@@ -5136,7 +5136,7 @@
               <a:t>3.1  </a:t>
             </a:r>
             <a:r>
-              <a:t>DTUMOS에 붙는 세 가지 방법</a:t>
+              <a:t>DTUMOS 연결 방법</a:t>
             </a:r>
           </a:p>
           <a:p>
@@ -5193,7 +5193,7 @@
           <a:lstStyle/>
           <a:p>
             <a:r>
-              <a:t>3.1 DTUMOS에 붙는 세 가지 방법</a:t>
+              <a:t>3.1 DTUMOS 연결 방법</a:t>
             </a:r>
           </a:p>
         </p:txBody>
@@ -5236,19 +5236,19 @@
           <a:p>
             <a:pPr/>
             <a:r>
-              <a:t>엔진 DTUMOS: Rust · Docker · HTTP 호출</a:t>
+              <a:t>DTUMOS 엔진: Rust로 구현 · Docker로 실행 · HTTP로 요청</a:t>
             </a:r>
           </a:p>
           <a:p>
             <a:pPr/>
             <a:r>
-              <a:t>이 과목의 범위: 엔진 내부가 아니라 호출 방법</a:t>
+              <a:t>학습 범위: 엔진 내부 구현이 아닌 호출과 결과 해석</a:t>
             </a:r>
           </a:p>
           <a:p>
             <a:pPr/>
             <a:r>
-              <a:t>세 번째가 중요 — 서버 없이도 교재가 멈추지 않음</a:t>
+              <a:t>녹화본: 서버에 연결하지 못해도 실습 계속 진행</a:t>
             </a:r>
           </a:p>
         </p:txBody>
@@ -5860,7 +5860,7 @@
           <a:p>
             <a:pPr/>
             <a:r>
-              <a:t>dt.health()의 status</a:t>
+              <a:t>dt.health()가 반환하는 status</a:t>
             </a:r>
           </a:p>
           <a:p>
@@ -5890,7 +5890,7 @@
           <a:p>
             <a:pPr/>
             <a:r>
-              <a:t>오류의 뜻: 코드 오류가 아니라 실서버 필요</a:t>
+              <a:t>FixtureMissing의 의미: 코드 오류가 아니라 실서버가 필요한 요청</a:t>
             </a:r>
           </a:p>
         </p:txBody>
@@ -6032,7 +6032,7 @@
               <a:t>4.1  </a:t>
             </a:r>
             <a:r>
-              <a:t>하남시 저녁 6시부터 자정까지</a:t>
+              <a:t>첫 시뮬레이션의 실행 조건</a:t>
             </a:r>
           </a:p>
           <a:p>
@@ -6050,7 +6050,7 @@
               <a:t>4.2  </a:t>
             </a:r>
             <a:r>
-              <a:t>결과 세 숫자</a:t>
+              <a:t>첫 실행의 결과 지표</a:t>
             </a:r>
           </a:p>
         </p:txBody>
@@ -6089,7 +6089,7 @@
           <a:lstStyle/>
           <a:p>
             <a:r>
-              <a:t>4.1 하남시 저녁 6시부터 자정까지</a:t>
+              <a:t>4.1 첫 시뮬레이션의 실행 조건</a:t>
             </a:r>
           </a:p>
         </p:txBody>
@@ -6638,7 +6638,7 @@
           <a:lstStyle/>
           <a:p>
             <a:r>
-              <a:t>4.2 결과 세 숫자</a:t>
+              <a:t>4.2 첫 실행의 결과 지표</a:t>
             </a:r>
           </a:p>
         </p:txBody>
@@ -6681,19 +6681,19 @@
           <a:p>
             <a:pPr/>
             <a:r>
-              <a:t>승객 관점: 대기 4분 — 양호</a:t>
+              <a:t>승객 관점: 평균 대기시간 약 4.1분</a:t>
             </a:r>
           </a:p>
           <a:p>
             <a:pPr/>
             <a:r>
-              <a:t>차량 관점: 4분의 3이 유휴</a:t>
+              <a:t>운영 관점: 차량 가동률 약 27%</a:t>
             </a:r>
           </a:p>
           <a:p>
             <a:pPr/>
             <a:r>
-              <a:t>이어지는 질문: 40대로 감축 시 대기시간 변화</a:t>
+              <a:t>비교할 대안: 차량 40대일 때의 대기시간과 서비스율</a:t>
             </a:r>
           </a:p>
         </p:txBody>
@@ -7335,7 +7335,7 @@
               <a:t>5.2  </a:t>
             </a:r>
             <a:r>
-              <a:t>80대가 항상 80대는 아님</a:t>
+              <a:t>보유 차량과 근무 차량의 차이</a:t>
             </a:r>
           </a:p>
         </p:txBody>
@@ -7423,13 +7423,13 @@
           <a:p>
             <a:pPr/>
             <a:r>
-              <a:t>운행 중 증가분 = 대기 중 감소분</a:t>
+              <a:t>운행 중 차량 증가 ↔ 대기 차량 감소</a:t>
             </a:r>
           </a:p>
           <a:p>
             <a:pPr/>
             <a:r>
-              <a:t>두 값의 합이 대부분 80</a:t>
+              <a:t>운행 중 차량과 대기 차량의 합: 대부분 80대</a:t>
             </a:r>
           </a:p>
         </p:txBody>
@@ -7561,7 +7561,7 @@
           <a:lstStyle/>
           <a:p>
             <a:r>
-              <a:t>5.2 80대가 항상 80대는 아님</a:t>
+              <a:t>5.2 보유 차량과 근무 차량의 차이</a:t>
             </a:r>
           </a:p>
         </p:txBody>
@@ -7622,7 +7622,7 @@
           <a:p>
             <a:pPr/>
             <a:r>
-              <a:t>결과 해석의 전제: 정원과 근무 인원의 구분</a:t>
+              <a:t>결과 해석 시 구분: 전체 차량과 현재 근무 중인 차량</a:t>
             </a:r>
           </a:p>
         </p:txBody>
@@ -7764,7 +7764,7 @@
               <a:t>6.1  </a:t>
             </a:r>
             <a:r>
-              <a:t>오늘의 정리</a:t>
+              <a:t>0장 정리</a:t>
             </a:r>
           </a:p>
           <a:p>
@@ -7919,7 +7919,7 @@
                           </a:solidFill>
                           <a:latin typeface="Pretendard"/>
                         </a:rPr>
-                        <a:t>도입과 학습 목표</a:t>
+                        <a:t>실습 준비</a:t>
                       </a:r>
                     </a:p>
                   </a:txBody>
@@ -7955,7 +7955,7 @@
                           </a:solidFill>
                           <a:latin typeface="Pretendard Medium"/>
                         </a:rPr>
-                        <a:t>1.1 오늘 준비하는 세 가지  ·  1.2 학습 목표  ·  1.3 교재와 실습을 여는 곳</a:t>
+                        <a:t>1.1 실습에 필요한 세 가지  ·  1.2 학습 목표  ·  1.3 교재와 실습을 여는 곳</a:t>
                       </a:r>
                     </a:p>
                   </a:txBody>
@@ -8065,7 +8065,7 @@
                           </a:solidFill>
                           <a:latin typeface="Pretendard Medium"/>
                         </a:rPr>
-                        <a:t>2.1 파이썬 환경과 의존성  ·  2.2 실습 도시 하남시</a:t>
+                        <a:t>2.1 파이썬 환경과 의존성  ·  2.2 실습 대상: 하남시</a:t>
                       </a:r>
                     </a:p>
                   </a:txBody>
@@ -8175,7 +8175,7 @@
                           </a:solidFill>
                           <a:latin typeface="Pretendard Medium"/>
                         </a:rPr>
-                        <a:t>3.1 DTUMOS에 붙는 세 가지 방법  ·  3.2 녹화본의 범위</a:t>
+                        <a:t>3.1 DTUMOS 연결 방법  ·  3.2 녹화본의 범위</a:t>
                       </a:r>
                     </a:p>
                   </a:txBody>
@@ -8285,7 +8285,7 @@
                           </a:solidFill>
                           <a:latin typeface="Pretendard Medium"/>
                         </a:rPr>
-                        <a:t>4.1 하남시 저녁 6시부터 자정까지  ·  4.2 결과 세 숫자</a:t>
+                        <a:t>4.1 첫 시뮬레이션의 실행 조건  ·  4.2 첫 실행의 결과 지표</a:t>
                       </a:r>
                     </a:p>
                   </a:txBody>
@@ -8395,7 +8395,7 @@
                           </a:solidFill>
                           <a:latin typeface="Pretendard Medium"/>
                         </a:rPr>
-                        <a:t>5.1 분 단위 기록 읽기  ·  5.2 80대가 항상 80대는 아님</a:t>
+                        <a:t>5.1 분 단위 기록 읽기  ·  5.2 보유 차량과 근무 차량의 차이</a:t>
                       </a:r>
                     </a:p>
                   </a:txBody>
@@ -8505,7 +8505,7 @@
                           </a:solidFill>
                           <a:latin typeface="Pretendard Medium"/>
                         </a:rPr>
-                        <a:t>6.1 오늘의 정리  ·  6.2 연습과 다음 장</a:t>
+                        <a:t>6.1 0장 정리  ·  6.2 연습과 다음 장</a:t>
                       </a:r>
                     </a:p>
                   </a:txBody>
@@ -8616,7 +8616,7 @@
           <a:lstStyle/>
           <a:p>
             <a:r>
-              <a:t>6.1 오늘의 정리</a:t>
+              <a:t>6.1 0장 정리</a:t>
             </a:r>
           </a:p>
         </p:txBody>
@@ -9014,7 +9014,7 @@
           <a:lstStyle/>
           <a:p>
             <a:r>
-              <a:t>도입과 학습 목표</a:t>
+              <a:t>실습 준비</a:t>
             </a:r>
           </a:p>
         </p:txBody>
@@ -9048,7 +9048,7 @@
               <a:t>1.1  </a:t>
             </a:r>
             <a:r>
-              <a:t>오늘 준비하는 세 가지</a:t>
+              <a:t>실습에 필요한 세 가지</a:t>
             </a:r>
           </a:p>
           <a:p>
@@ -9123,7 +9123,7 @@
           <a:lstStyle/>
           <a:p>
             <a:r>
-              <a:t>1.1 오늘 준비하는 세 가지</a:t>
+              <a:t>1.1 실습에 필요한 세 가지</a:t>
             </a:r>
           </a:p>
         </p:txBody>
@@ -9144,7 +9144,7 @@
           <a:lstStyle/>
           <a:p>
             <a:r>
-              <a:t>1. 도입과 학습 목표</a:t>
+              <a:t>1. 실습 준비</a:t>
             </a:r>
           </a:p>
         </p:txBody>
@@ -9166,13 +9166,13 @@
           <a:p>
             <a:pPr/>
             <a:r>
-              <a:t>교재의 모든 코드는 실행되는 상태 — 같은 숫자, 같은 그림</a:t>
+              <a:t>실습 환경의 기준: 교재와 같은 숫자와 그림을 재현할 수 있는 상태</a:t>
             </a:r>
           </a:p>
           <a:p>
             <a:pPr/>
             <a:r>
-              <a:t>필요한 것 3가지</a:t>
+              <a:t>준비 항목 3가지</a:t>
             </a:r>
           </a:p>
           <a:p>
@@ -9196,7 +9196,7 @@
           <a:p>
             <a:pPr/>
             <a:r>
-              <a:t>마지막 순서: 하남시 택시 시뮬레이션 1회 실행</a:t>
+              <a:t>최종 확인: 하남시 택시 시뮬레이션 1회 실행</a:t>
             </a:r>
           </a:p>
         </p:txBody>
@@ -9304,7 +9304,7 @@
           <a:lstStyle/>
           <a:p>
             <a:r>
-              <a:t>1. 도입과 학습 목표</a:t>
+              <a:t>1. 실습 준비</a:t>
             </a:r>
           </a:p>
         </p:txBody>
@@ -9452,7 +9452,7 @@
           <a:lstStyle/>
           <a:p>
             <a:r>
-              <a:t>1. 도입과 학습 목표</a:t>
+              <a:t>1. 실습 준비</a:t>
             </a:r>
           </a:p>
         </p:txBody>
@@ -9911,7 +9911,7 @@
               <a:t>2.2  </a:t>
             </a:r>
             <a:r>
-              <a:t>실습 도시 하남시</a:t>
+              <a:t>실습 대상: 하남시</a:t>
             </a:r>
           </a:p>
         </p:txBody>
@@ -9993,31 +9993,37 @@
           <a:p>
             <a:pPr/>
             <a:r>
-              <a:t>파이썬 3.11 · 저장소 복제 후 pip install -r requirements.txt</a:t>
+              <a:t>파이썬 3.11 · 저장소 복제 후 의존성 설치</a:t>
             </a:r>
           </a:p>
           <a:p>
             <a:pPr lvl="1"/>
             <a:r>
+              <a:t>pip install -r requirements.txt</a:t>
+            </a:r>
+          </a:p>
+          <a:p>
+            <a:pPr lvl="1"/>
+            <a:r>
               <a:t>버전 고정 — 같은 버전이면 교재와 같은 그림</a:t>
             </a:r>
           </a:p>
           <a:p>
             <a:pPr/>
             <a:r>
-              <a:t>9장 예측 모델은 requirements-heavy.txt 추가</a:t>
+              <a:t>9장 예측 모델: requirements-heavy.txt 추가 설치</a:t>
             </a:r>
           </a:p>
           <a:p>
             <a:pPr lvl="1"/>
             <a:r>
-              <a:t>그 주에 설치해도 무방</a:t>
+              <a:t>9주차에 설치 가능</a:t>
             </a:r>
           </a:p>
           <a:p>
             <a:pPr/>
             <a:r>
-              <a:t>코랩: 각 장 상단 Colab 배지 → 첫 셀에서 smartmob.colab.bootstrap()</a:t>
+              <a:t>Google Colab: 각 장 상단의 Colab 배지 → 첫 셀에서 smartmob.colab.bootstrap()</a:t>
             </a:r>
           </a:p>
         </p:txBody>
@@ -10104,7 +10110,7 @@
           <a:lstStyle/>
           <a:p>
             <a:r>
-              <a:t>2.2 실습 도시 하남시</a:t>
+              <a:t>2.2 실습 대상: 하남시</a:t>
             </a:r>
           </a:p>
         </p:txBody>
@@ -10147,7 +10153,7 @@
           <a:p>
             <a:pPr/>
             <a:r>
-              <a:t>선정 이유: 서울 인접 + 노트북에서 다룰 만한 크기</a:t>
+              <a:t>선정 이유: 서울과 인접하고 노트북에서 처리할 수 있는 규모</a:t>
             </a:r>
           </a:p>
           <a:p>
@@ -10177,7 +10183,13 @@
           <a:p>
             <a:pPr/>
             <a:r>
-              <a:t>노드 기준: 교차로와 막다른 길만 — 사이 직선 구간은 엣지 하나</a:t>
+              <a:t>노드 기준: 교차로와 막다른 길</a:t>
+            </a:r>
+          </a:p>
+          <a:p>
+            <a:pPr lvl="1"/>
+            <a:r>
+              <a:t>두 노드 사이의 직선 구간은 엣지 하나로 표현</a:t>
             </a:r>
           </a:p>
         </p:txBody>
